--- a/docs/downloads/Day1/1005_ai-family-tree_FR.pptx
+++ b/docs/downloads/Day1/1005_ai-family-tree_FR.pptx
@@ -5,7 +5,7 @@
     <p:sldMasterId id="2147483648" r:id="rId1"/>
   </p:sldMasterIdLst>
   <p:notesMasterIdLst>
-    <p:notesMasterId r:id="rId41"/>
+    <p:notesMasterId r:id="rId39"/>
   </p:notesMasterIdLst>
   <p:sldIdLst>
     <p:sldId id="256" r:id="rId2"/>
@@ -38,15 +38,13 @@
     <p:sldId id="283" r:id="rId29"/>
     <p:sldId id="284" r:id="rId30"/>
     <p:sldId id="285" r:id="rId31"/>
-    <p:sldId id="286" r:id="rId32"/>
-    <p:sldId id="287" r:id="rId33"/>
-    <p:sldId id="288" r:id="rId34"/>
-    <p:sldId id="289" r:id="rId35"/>
-    <p:sldId id="290" r:id="rId36"/>
-    <p:sldId id="291" r:id="rId37"/>
-    <p:sldId id="292" r:id="rId38"/>
-    <p:sldId id="293" r:id="rId39"/>
-    <p:sldId id="294" r:id="rId40"/>
+    <p:sldId id="287" r:id="rId32"/>
+    <p:sldId id="288" r:id="rId33"/>
+    <p:sldId id="289" r:id="rId34"/>
+    <p:sldId id="290" r:id="rId35"/>
+    <p:sldId id="292" r:id="rId36"/>
+    <p:sldId id="293" r:id="rId37"/>
+    <p:sldId id="294" r:id="rId38"/>
   </p:sldIdLst>
   <p:sldSz cx="9144000" cy="5143500" type="screen16x9"/>
   <p:notesSz cx="5143500" cy="9144000"/>
@@ -172,7 +170,7 @@
               </a:defRPr>
             </a:pPr>
             <a:r>
-              <a:rPr sz="1000" b="0" i="0" u="none" strike="noStrike">
+              <a:rPr lang="fr-FR" sz="1000" b="0" i="0" u="none" strike="noStrike">
                 <a:solidFill>
                   <a:srgbClr val="231F20"/>
                 </a:solidFill>
@@ -494,7 +492,7 @@
               </a:defRPr>
             </a:pPr>
             <a:r>
-              <a:rPr sz="1000" b="0" i="0" u="none" strike="noStrike">
+              <a:rPr lang="fr-FR" sz="1000" b="0" i="0" u="none" strike="noStrike">
                 <a:solidFill>
                   <a:srgbClr val="231F20"/>
                 </a:solidFill>
@@ -2985,7 +2983,7 @@
           <a:p>
             <a:r>
               <a:rPr lang="en-US" dirty="0"/>
-              <a:t>Ne pas remercier, ne pas résumer. Finir sur la consigne : apporter au laboratoire une vraie question de leur institut. Les ateliers se passent mal quand les participants arrivent avec une question d'exercice, et bien quand ils arrivent avec une question que leur directeur leur a réellement posée. À 15h00, ils ajouteront la troisième colonne et lui donneront des outils.</a:t>
+              <a:t>Diapositives de réserve, à utiliser uniquement si les questions les appellent.</a:t>
             </a:r>
           </a:p>
         </p:txBody>
@@ -3072,7 +3070,7 @@
           <a:p>
             <a:r>
               <a:rPr lang="en-US" dirty="0"/>
-              <a:t>Diapositives de réserve, à utiliser uniquement si les questions les appellent.</a:t>
+              <a:t>Glossaire de référence pour un public bilingue. Signaler que le sigle GML (grand modèle de langage) correspond à LLM en anglais, et que la documentation technique des ateliers sera souvent en anglais.</a:t>
             </a:r>
           </a:p>
         </p:txBody>
@@ -3159,7 +3157,7 @@
           <a:p>
             <a:r>
               <a:rPr lang="en-US" dirty="0"/>
-              <a:t>Glossaire de référence pour un public bilingue. Signaler que le sigle GML (grand modèle de langage) correspond à LLM en anglais, et que la documentation technique des ateliers sera souvent en anglais.</a:t>
+              <a:t>À utiliser si quelqu'un demande le rapport entre apprentissage automatique et leur métier. Breiman était des leurs et s'adressait à des statisticiens. L'apprentissage automatique n'a pas remplacé la statistique : il a fait un autre arbitrage, cédant l'interprétation pour acheter de l'exactitude prédictive.</a:t>
             </a:r>
           </a:p>
         </p:txBody>
@@ -3246,7 +3244,7 @@
           <a:p>
             <a:r>
               <a:rPr lang="en-US" dirty="0"/>
-              <a:t>À utiliser si quelqu'un demande le rapport entre apprentissage automatique et leur métier. Breiman était des leurs et s'adressait à des statisticiens. L'apprentissage automatique n'a pas remplacé la statistique : il a fait un autre arbitrage, cédant l'interprétation pour acheter de l'exactitude prédictive.</a:t>
+              <a:t>À utiliser si la question de la taxonomie vient. Ancrer chaque famille dans ce que les participants possèdent déjà. Dire franchement que l'apprentissage par renforcement a très peu d'usages directs en statistique officielle, même s'il sert à entraîner les GML à suivre des instructions.</a:t>
             </a:r>
           </a:p>
         </p:txBody>
@@ -3333,7 +3331,7 @@
           <a:p>
             <a:r>
               <a:rPr lang="en-US" dirty="0"/>
-              <a:t>À utiliser si la question de la taxonomie vient. Ancrer chaque famille dans ce que les participants possèdent déjà. Dire franchement que l'apprentissage par renforcement a très peu d'usages directs en statistique officielle, même s'il sert à entraîner les GML à suivre des instructions.</a:t>
+              <a:t>Sources complètes. Les références ajoutées dans cette version concernent la notion de modèle (Box), AI Ready (Commerce, FCSM, FMI), l'AGI (Legg &amp; Hutter, Chollet, Morris et al., Grace et al., Blili-Hamelin et al.) et la gouvernance actuelle du MCP. Vérifier la version de la spécification MCP le jour même.</a:t>
             </a:r>
           </a:p>
         </p:txBody>
@@ -3420,7 +3418,7 @@
           <a:p>
             <a:r>
               <a:rPr lang="en-US" dirty="0"/>
-              <a:t>À utiliser si quelqu'un demande s'il faut entraîner son propre modèle. La réponse retire une décision au lieu d'en ajouter une. Distinguer explicitement pré-entraînement et affinage : on les confond constamment, et seul le premier est hors de portée.</a:t>
+              <a:t>Sources complètes. Les références ajoutées dans cette version concernent la notion de modèle (Box), AI Ready (Commerce, FCSM, FMI), l'AGI (Legg &amp; Hutter, Chollet, Morris et al., Grace et al., Blili-Hamelin et al.) et la gouvernance actuelle du MCP. Vérifier la version de la spécification MCP le jour même.</a:t>
             </a:r>
           </a:p>
         </p:txBody>
@@ -3530,180 +3528,6 @@
             <a:fld id="{F7021451-1387-4CA6-816F-3879F97B5CBC}" type="slidenum">
               <a:rPr lang="en-US"/>
               <a:t>37</a:t>
-            </a:fld>
-            <a:endParaRPr lang="en-US"/>
-          </a:p>
-        </p:txBody>
-      </p:sp>
-    </p:spTree>
-    <p:extLst>
-      <p:ext uri="{BB962C8B-B14F-4D97-AF65-F5344CB8AC3E}">
-        <p14:creationId xmlns:p14="http://schemas.microsoft.com/office/powerpoint/2010/main" val="1024086991"/>
-      </p:ext>
-    </p:extLst>
-  </p:cSld>
-  <p:clrMapOvr>
-    <a:masterClrMapping/>
-  </p:clrMapOvr>
-</p:notes>
-</file>
-
-<file path=ppt/notesSlides/notesSlide38.xml><?xml version="1.0" encoding="utf-8"?>
-<p:notes xmlns:a="http://schemas.openxmlformats.org/drawingml/2006/main" xmlns:r="http://schemas.openxmlformats.org/officeDocument/2006/relationships" xmlns:p="http://schemas.openxmlformats.org/presentationml/2006/main">
-  <p:cSld>
-    <p:spTree>
-      <p:nvGrpSpPr>
-        <p:cNvPr id="1" name=""/>
-        <p:cNvGrpSpPr/>
-        <p:nvPr/>
-      </p:nvGrpSpPr>
-      <p:grpSpPr>
-        <a:xfrm>
-          <a:off x="0" y="0"/>
-          <a:ext cx="0" cy="0"/>
-          <a:chOff x="0" y="0"/>
-          <a:chExt cx="0" cy="0"/>
-        </a:xfrm>
-      </p:grpSpPr>
-      <p:sp>
-        <p:nvSpPr>
-          <p:cNvPr id="2" name="Slide Image Placeholder 1"/>
-          <p:cNvSpPr>
-            <a:spLocks noGrp="1" noRot="1" noChangeAspect="1"/>
-          </p:cNvSpPr>
-          <p:nvPr>
-            <p:ph type="sldImg"/>
-          </p:nvPr>
-        </p:nvSpPr>
-        <p:spPr/>
-      </p:sp>
-      <p:sp>
-        <p:nvSpPr>
-          <p:cNvPr id="3" name="Notes Placeholder 2"/>
-          <p:cNvSpPr>
-            <a:spLocks noGrp="1"/>
-          </p:cNvSpPr>
-          <p:nvPr>
-            <p:ph type="body" idx="1"/>
-          </p:nvPr>
-        </p:nvSpPr>
-        <p:spPr/>
-        <p:txBody>
-          <a:bodyPr/>
-          <a:lstStyle/>
-          <a:p>
-            <a:r>
-              <a:rPr lang="en-US" dirty="0"/>
-              <a:t>Sources complètes. Les références ajoutées dans cette version concernent la notion de modèle (Box), AI Ready (Commerce, FCSM, FMI), l'AGI (Legg &amp; Hutter, Chollet, Morris et al., Grace et al., Blili-Hamelin et al.) et la gouvernance actuelle du MCP. Vérifier la version de la spécification MCP le jour même.</a:t>
-            </a:r>
-          </a:p>
-        </p:txBody>
-      </p:sp>
-      <p:sp>
-        <p:nvSpPr>
-          <p:cNvPr id="4" name="Slide Number Placeholder 3"/>
-          <p:cNvSpPr>
-            <a:spLocks noGrp="1"/>
-          </p:cNvSpPr>
-          <p:nvPr>
-            <p:ph type="sldNum" sz="quarter" idx="10"/>
-          </p:nvPr>
-        </p:nvSpPr>
-        <p:spPr/>
-        <p:txBody>
-          <a:bodyPr/>
-          <a:lstStyle/>
-          <a:p>
-            <a:fld id="{F7021451-1387-4CA6-816F-3879F97B5CBC}" type="slidenum">
-              <a:rPr lang="en-US"/>
-              <a:t>38</a:t>
-            </a:fld>
-            <a:endParaRPr lang="en-US"/>
-          </a:p>
-        </p:txBody>
-      </p:sp>
-    </p:spTree>
-    <p:extLst>
-      <p:ext uri="{BB962C8B-B14F-4D97-AF65-F5344CB8AC3E}">
-        <p14:creationId xmlns:p14="http://schemas.microsoft.com/office/powerpoint/2010/main" val="1024086991"/>
-      </p:ext>
-    </p:extLst>
-  </p:cSld>
-  <p:clrMapOvr>
-    <a:masterClrMapping/>
-  </p:clrMapOvr>
-</p:notes>
-</file>
-
-<file path=ppt/notesSlides/notesSlide39.xml><?xml version="1.0" encoding="utf-8"?>
-<p:notes xmlns:a="http://schemas.openxmlformats.org/drawingml/2006/main" xmlns:r="http://schemas.openxmlformats.org/officeDocument/2006/relationships" xmlns:p="http://schemas.openxmlformats.org/presentationml/2006/main">
-  <p:cSld>
-    <p:spTree>
-      <p:nvGrpSpPr>
-        <p:cNvPr id="1" name=""/>
-        <p:cNvGrpSpPr/>
-        <p:nvPr/>
-      </p:nvGrpSpPr>
-      <p:grpSpPr>
-        <a:xfrm>
-          <a:off x="0" y="0"/>
-          <a:ext cx="0" cy="0"/>
-          <a:chOff x="0" y="0"/>
-          <a:chExt cx="0" cy="0"/>
-        </a:xfrm>
-      </p:grpSpPr>
-      <p:sp>
-        <p:nvSpPr>
-          <p:cNvPr id="2" name="Slide Image Placeholder 1"/>
-          <p:cNvSpPr>
-            <a:spLocks noGrp="1" noRot="1" noChangeAspect="1"/>
-          </p:cNvSpPr>
-          <p:nvPr>
-            <p:ph type="sldImg"/>
-          </p:nvPr>
-        </p:nvSpPr>
-        <p:spPr/>
-      </p:sp>
-      <p:sp>
-        <p:nvSpPr>
-          <p:cNvPr id="3" name="Notes Placeholder 2"/>
-          <p:cNvSpPr>
-            <a:spLocks noGrp="1"/>
-          </p:cNvSpPr>
-          <p:nvPr>
-            <p:ph type="body" idx="1"/>
-          </p:nvPr>
-        </p:nvSpPr>
-        <p:spPr/>
-        <p:txBody>
-          <a:bodyPr/>
-          <a:lstStyle/>
-          <a:p>
-            <a:r>
-              <a:rPr lang="en-US" dirty="0"/>
-              <a:t>Sources complètes. Les références ajoutées dans cette version concernent la notion de modèle (Box), AI Ready (Commerce, FCSM, FMI), l'AGI (Legg &amp; Hutter, Chollet, Morris et al., Grace et al., Blili-Hamelin et al.) et la gouvernance actuelle du MCP. Vérifier la version de la spécification MCP le jour même.</a:t>
-            </a:r>
-          </a:p>
-        </p:txBody>
-      </p:sp>
-      <p:sp>
-        <p:nvSpPr>
-          <p:cNvPr id="4" name="Slide Number Placeholder 3"/>
-          <p:cNvSpPr>
-            <a:spLocks noGrp="1"/>
-          </p:cNvSpPr>
-          <p:nvPr>
-            <p:ph type="sldNum" sz="quarter" idx="10"/>
-          </p:nvPr>
-        </p:nvSpPr>
-        <p:spPr/>
-        <p:txBody>
-          <a:bodyPr/>
-          <a:lstStyle/>
-          <a:p>
-            <a:fld id="{F7021451-1387-4CA6-816F-3879F97B5CBC}" type="slidenum">
-              <a:rPr lang="en-US"/>
-              <a:t>39</a:t>
             </a:fld>
             <a:endParaRPr lang="en-US"/>
           </a:p>
@@ -34643,678 +34467,6 @@
 
 <file path=ppt/slides/slide31.xml><?xml version="1.0" encoding="utf-8"?>
 <p:sld xmlns:a="http://schemas.openxmlformats.org/drawingml/2006/main" xmlns:r="http://schemas.openxmlformats.org/officeDocument/2006/relationships" xmlns:p="http://schemas.openxmlformats.org/presentationml/2006/main">
-  <p:cSld name="Slide 31">
-    <p:bg>
-      <p:bgPr>
-        <a:blipFill dpi="0" rotWithShape="1">
-          <a:blip r:embed="rId3">
-            <a:lum/>
-          </a:blip>
-          <a:srcRect/>
-          <a:stretch>
-            <a:fillRect/>
-          </a:stretch>
-        </a:blipFill>
-        <a:effectLst/>
-      </p:bgPr>
-    </p:bg>
-    <p:spTree>
-      <p:nvGrpSpPr>
-        <p:cNvPr id="1" name=""/>
-        <p:cNvGrpSpPr/>
-        <p:nvPr/>
-      </p:nvGrpSpPr>
-      <p:grpSpPr>
-        <a:xfrm>
-          <a:off x="0" y="0"/>
-          <a:ext cx="0" cy="0"/>
-          <a:chOff x="0" y="0"/>
-          <a:chExt cx="0" cy="0"/>
-        </a:xfrm>
-      </p:grpSpPr>
-      <p:sp>
-        <p:nvSpPr>
-          <p:cNvPr id="2" name="Text 0"/>
-          <p:cNvSpPr txBox="1"/>
-          <p:nvPr/>
-        </p:nvSpPr>
-        <p:spPr>
-          <a:xfrm>
-            <a:off x="548640" y="685800"/>
-            <a:ext cx="4572000" cy="228600"/>
-          </a:xfrm>
-          <a:prstGeom prst="rect">
-            <a:avLst/>
-          </a:prstGeom>
-          <a:noFill/>
-          <a:ln/>
-        </p:spPr>
-        <p:txBody>
-          <a:bodyPr wrap="square" lIns="0" tIns="0" rIns="0" bIns="0" rtlCol="0" anchor="t"/>
-          <a:lstStyle/>
-          <a:p>
-            <a:pPr marL="0" indent="0">
-              <a:buNone/>
-            </a:pPr>
-            <a:r>
-              <a:rPr lang="en-US" sz="1050" b="1" kern="0" spc="300" dirty="0">
-                <a:solidFill>
-                  <a:srgbClr val="F5C242"/>
-                </a:solidFill>
-                <a:latin typeface="Calibri" pitchFamily="34" charset="0"/>
-                <a:ea typeface="Calibri" pitchFamily="34" charset="-122"/>
-                <a:cs typeface="Calibri" pitchFamily="34" charset="-120"/>
-              </a:rPr>
-              <a:t>LA SUITE DU JOUR 1</a:t>
-            </a:r>
-            <a:endParaRPr lang="en-US" sz="1050" dirty="0"/>
-          </a:p>
-        </p:txBody>
-      </p:sp>
-      <p:sp>
-        <p:nvSpPr>
-          <p:cNvPr id="3" name="Text 1"/>
-          <p:cNvSpPr txBox="1"/>
-          <p:nvPr/>
-        </p:nvSpPr>
-        <p:spPr>
-          <a:xfrm>
-            <a:off x="548640" y="960120"/>
-            <a:ext cx="8138160" cy="777240"/>
-          </a:xfrm>
-          <a:prstGeom prst="rect">
-            <a:avLst/>
-          </a:prstGeom>
-          <a:noFill/>
-          <a:ln/>
-        </p:spPr>
-        <p:txBody>
-          <a:bodyPr wrap="square" lIns="0" tIns="0" rIns="0" bIns="0" rtlCol="0" anchor="ctr"/>
-          <a:lstStyle/>
-          <a:p>
-            <a:pPr marL="0" indent="0">
-              <a:buNone/>
-            </a:pPr>
-            <a:r>
-              <a:rPr lang="en-US" sz="3000" b="1" dirty="0">
-                <a:solidFill>
-                  <a:srgbClr val="FFFFFF"/>
-                </a:solidFill>
-                <a:latin typeface="Calibri" pitchFamily="34" charset="0"/>
-                <a:ea typeface="Calibri" pitchFamily="34" charset="-122"/>
-                <a:cs typeface="Calibri" pitchFamily="34" charset="-120"/>
-              </a:rPr>
-              <a:t>À 10h30, vous construirez la colonne du milieu.</a:t>
-            </a:r>
-            <a:endParaRPr lang="en-US" sz="3000" dirty="0"/>
-          </a:p>
-        </p:txBody>
-      </p:sp>
-      <p:sp>
-        <p:nvSpPr>
-          <p:cNvPr id="4" name="Text 2"/>
-          <p:cNvSpPr txBox="1"/>
-          <p:nvPr/>
-        </p:nvSpPr>
-        <p:spPr>
-          <a:xfrm>
-            <a:off x="548640" y="1783080"/>
-            <a:ext cx="6858000" cy="457200"/>
-          </a:xfrm>
-          <a:prstGeom prst="rect">
-            <a:avLst/>
-          </a:prstGeom>
-          <a:noFill/>
-          <a:ln/>
-        </p:spPr>
-        <p:txBody>
-          <a:bodyPr wrap="square" lIns="0" tIns="0" rIns="0" bIns="0" rtlCol="0" anchor="t"/>
-          <a:lstStyle/>
-          <a:p>
-            <a:pPr marL="0" indent="0">
-              <a:buNone/>
-            </a:pPr>
-            <a:r>
-              <a:rPr lang="en-US" sz="1600" i="1" dirty="0">
-                <a:solidFill>
-                  <a:srgbClr val="E6F6EE"/>
-                </a:solidFill>
-                <a:latin typeface="Calibri" pitchFamily="34" charset="0"/>
-                <a:ea typeface="Calibri" pitchFamily="34" charset="-122"/>
-                <a:cs typeface="Calibri" pitchFamily="34" charset="-120"/>
-              </a:rPr>
-              <a:t>Le RAG est le seul montage de cette pile qui oblige un modèle à montrer d'où vient sa réponse.</a:t>
-            </a:r>
-            <a:endParaRPr lang="en-US" sz="1600" dirty="0"/>
-          </a:p>
-        </p:txBody>
-      </p:sp>
-      <p:sp>
-        <p:nvSpPr>
-          <p:cNvPr id="5" name="Shape 3"/>
-          <p:cNvSpPr/>
-          <p:nvPr/>
-        </p:nvSpPr>
-        <p:spPr>
-          <a:xfrm>
-            <a:off x="548640" y="2514600"/>
-            <a:ext cx="2514600" cy="1143000"/>
-          </a:xfrm>
-          <a:prstGeom prst="roundRect">
-            <a:avLst>
-              <a:gd name="adj" fmla="val 6400"/>
-            </a:avLst>
-          </a:prstGeom>
-          <a:solidFill>
-            <a:srgbClr val="FFFFFF">
-              <a:alpha val="12000"/>
-            </a:srgbClr>
-          </a:solidFill>
-          <a:ln w="9525">
-            <a:solidFill>
-              <a:srgbClr val="FFFFFF">
-                <a:alpha val="50000"/>
-              </a:srgbClr>
-            </a:solidFill>
-            <a:prstDash val="solid"/>
-          </a:ln>
-        </p:spPr>
-      </p:sp>
-      <p:pic>
-        <p:nvPicPr>
-          <p:cNvPr id="6" name="Image 0" descr="preencoded.png"/>
-          <p:cNvPicPr>
-            <a:picLocks noChangeAspect="1"/>
-          </p:cNvPicPr>
-          <p:nvPr/>
-        </p:nvPicPr>
-        <p:blipFill>
-          <a:blip r:embed="rId4"/>
-          <a:stretch>
-            <a:fillRect/>
-          </a:stretch>
-        </p:blipFill>
-        <p:spPr>
-          <a:xfrm>
-            <a:off x="713232" y="2670048"/>
-            <a:ext cx="310896" cy="310896"/>
-          </a:xfrm>
-          <a:prstGeom prst="rect">
-            <a:avLst/>
-          </a:prstGeom>
-        </p:spPr>
-      </p:pic>
-      <p:sp>
-        <p:nvSpPr>
-          <p:cNvPr id="7" name="Text 4"/>
-          <p:cNvSpPr txBox="1"/>
-          <p:nvPr/>
-        </p:nvSpPr>
-        <p:spPr>
-          <a:xfrm>
-            <a:off x="1115568" y="2651760"/>
-            <a:ext cx="1737360" cy="347472"/>
-          </a:xfrm>
-          <a:prstGeom prst="rect">
-            <a:avLst/>
-          </a:prstGeom>
-          <a:noFill/>
-          <a:ln/>
-        </p:spPr>
-        <p:txBody>
-          <a:bodyPr wrap="square" lIns="0" tIns="0" rIns="0" bIns="0" rtlCol="0" anchor="ctr"/>
-          <a:lstStyle/>
-          <a:p>
-            <a:pPr marL="0" indent="0">
-              <a:buNone/>
-            </a:pPr>
-            <a:r>
-              <a:rPr lang="en-US" sz="2000" b="1" dirty="0">
-                <a:solidFill>
-                  <a:srgbClr val="F5C242"/>
-                </a:solidFill>
-                <a:latin typeface="Calibri" pitchFamily="34" charset="0"/>
-                <a:ea typeface="Calibri" pitchFamily="34" charset="-122"/>
-                <a:cs typeface="Calibri" pitchFamily="34" charset="-120"/>
-              </a:rPr>
-              <a:t>10h30</a:t>
-            </a:r>
-            <a:endParaRPr lang="en-US" sz="2000" dirty="0"/>
-          </a:p>
-        </p:txBody>
-      </p:sp>
-      <p:sp>
-        <p:nvSpPr>
-          <p:cNvPr id="8" name="Text 5"/>
-          <p:cNvSpPr txBox="1"/>
-          <p:nvPr/>
-        </p:nvSpPr>
-        <p:spPr>
-          <a:xfrm>
-            <a:off x="713232" y="3063240"/>
-            <a:ext cx="2240280" cy="548640"/>
-          </a:xfrm>
-          <a:prstGeom prst="rect">
-            <a:avLst/>
-          </a:prstGeom>
-          <a:noFill/>
-          <a:ln/>
-        </p:spPr>
-        <p:txBody>
-          <a:bodyPr wrap="square" lIns="0" tIns="0" rIns="0" bIns="0" rtlCol="0" anchor="t"/>
-          <a:lstStyle/>
-          <a:p>
-            <a:pPr marL="0" indent="0">
-              <a:buNone/>
-            </a:pPr>
-            <a:r>
-              <a:rPr lang="en-US" sz="850" b="1" kern="0" spc="200" dirty="0">
-                <a:solidFill>
-                  <a:srgbClr val="E6F6EE"/>
-                </a:solidFill>
-                <a:latin typeface="Calibri" pitchFamily="34" charset="0"/>
-                <a:ea typeface="Calibri" pitchFamily="34" charset="-122"/>
-                <a:cs typeface="Calibri" pitchFamily="34" charset="-120"/>
-              </a:rPr>
-              <a:t>ATELIER PRATIQUE</a:t>
-            </a:r>
-            <a:endParaRPr lang="en-US" sz="1100" dirty="0"/>
-          </a:p>
-          <a:p>
-            <a:pPr marL="0" indent="0">
-              <a:buNone/>
-            </a:pPr>
-            <a:r>
-              <a:rPr lang="en-US" sz="1150" b="1" dirty="0">
-                <a:solidFill>
-                  <a:srgbClr val="FFFFFF"/>
-                </a:solidFill>
-                <a:latin typeface="Calibri" pitchFamily="34" charset="0"/>
-                <a:ea typeface="Calibri" pitchFamily="34" charset="-122"/>
-                <a:cs typeface="Calibri" pitchFamily="34" charset="-120"/>
-              </a:rPr>
-              <a:t>Génération augmentée par recherche (RAG)</a:t>
-            </a:r>
-            <a:endParaRPr lang="en-US" sz="1100" dirty="0"/>
-          </a:p>
-        </p:txBody>
-      </p:sp>
-      <p:sp>
-        <p:nvSpPr>
-          <p:cNvPr id="9" name="Shape 6"/>
-          <p:cNvSpPr/>
-          <p:nvPr/>
-        </p:nvSpPr>
-        <p:spPr>
-          <a:xfrm>
-            <a:off x="3246120" y="2514600"/>
-            <a:ext cx="2514600" cy="1143000"/>
-          </a:xfrm>
-          <a:prstGeom prst="roundRect">
-            <a:avLst>
-              <a:gd name="adj" fmla="val 6400"/>
-            </a:avLst>
-          </a:prstGeom>
-          <a:solidFill>
-            <a:srgbClr val="FFFFFF">
-              <a:alpha val="12000"/>
-            </a:srgbClr>
-          </a:solidFill>
-          <a:ln w="9525">
-            <a:solidFill>
-              <a:srgbClr val="FFFFFF">
-                <a:alpha val="50000"/>
-              </a:srgbClr>
-            </a:solidFill>
-            <a:prstDash val="solid"/>
-          </a:ln>
-        </p:spPr>
-      </p:sp>
-      <p:pic>
-        <p:nvPicPr>
-          <p:cNvPr id="10" name="Image 1" descr="preencoded.png"/>
-          <p:cNvPicPr>
-            <a:picLocks noChangeAspect="1"/>
-          </p:cNvPicPr>
-          <p:nvPr/>
-        </p:nvPicPr>
-        <p:blipFill>
-          <a:blip r:embed="rId5"/>
-          <a:stretch>
-            <a:fillRect/>
-          </a:stretch>
-        </p:blipFill>
-        <p:spPr>
-          <a:xfrm>
-            <a:off x="3410712" y="2670048"/>
-            <a:ext cx="310896" cy="310896"/>
-          </a:xfrm>
-          <a:prstGeom prst="rect">
-            <a:avLst/>
-          </a:prstGeom>
-        </p:spPr>
-      </p:pic>
-      <p:sp>
-        <p:nvSpPr>
-          <p:cNvPr id="11" name="Text 7"/>
-          <p:cNvSpPr txBox="1"/>
-          <p:nvPr/>
-        </p:nvSpPr>
-        <p:spPr>
-          <a:xfrm>
-            <a:off x="3813048" y="2651760"/>
-            <a:ext cx="1737360" cy="347472"/>
-          </a:xfrm>
-          <a:prstGeom prst="rect">
-            <a:avLst/>
-          </a:prstGeom>
-          <a:noFill/>
-          <a:ln/>
-        </p:spPr>
-        <p:txBody>
-          <a:bodyPr wrap="square" lIns="0" tIns="0" rIns="0" bIns="0" rtlCol="0" anchor="ctr"/>
-          <a:lstStyle/>
-          <a:p>
-            <a:pPr marL="0" indent="0">
-              <a:buNone/>
-            </a:pPr>
-            <a:r>
-              <a:rPr lang="en-US" sz="2000" b="1" dirty="0">
-                <a:solidFill>
-                  <a:srgbClr val="F5C242"/>
-                </a:solidFill>
-                <a:latin typeface="Calibri" pitchFamily="34" charset="0"/>
-                <a:ea typeface="Calibri" pitchFamily="34" charset="-122"/>
-                <a:cs typeface="Calibri" pitchFamily="34" charset="-120"/>
-              </a:rPr>
-              <a:t>13h30</a:t>
-            </a:r>
-            <a:endParaRPr lang="en-US" sz="2000" dirty="0"/>
-          </a:p>
-        </p:txBody>
-      </p:sp>
-      <p:sp>
-        <p:nvSpPr>
-          <p:cNvPr id="12" name="Text 8"/>
-          <p:cNvSpPr txBox="1"/>
-          <p:nvPr/>
-        </p:nvSpPr>
-        <p:spPr>
-          <a:xfrm>
-            <a:off x="3410712" y="3063240"/>
-            <a:ext cx="2240280" cy="548640"/>
-          </a:xfrm>
-          <a:prstGeom prst="rect">
-            <a:avLst/>
-          </a:prstGeom>
-          <a:noFill/>
-          <a:ln/>
-        </p:spPr>
-        <p:txBody>
-          <a:bodyPr wrap="square" lIns="0" tIns="0" rIns="0" bIns="0" rtlCol="0" anchor="t"/>
-          <a:lstStyle/>
-          <a:p>
-            <a:pPr marL="0" indent="0">
-              <a:buNone/>
-            </a:pPr>
-            <a:r>
-              <a:rPr lang="en-US" sz="850" b="1" kern="0" spc="200" dirty="0">
-                <a:solidFill>
-                  <a:srgbClr val="E6F6EE"/>
-                </a:solidFill>
-                <a:latin typeface="Calibri" pitchFamily="34" charset="0"/>
-                <a:ea typeface="Calibri" pitchFamily="34" charset="-122"/>
-                <a:cs typeface="Calibri" pitchFamily="34" charset="-120"/>
-              </a:rPr>
-              <a:t>EXPOSÉ</a:t>
-            </a:r>
-            <a:endParaRPr lang="en-US" sz="1100" dirty="0"/>
-          </a:p>
-          <a:p>
-            <a:pPr marL="0" indent="0">
-              <a:buNone/>
-            </a:pPr>
-            <a:r>
-              <a:rPr lang="en-US" sz="1150" b="1" dirty="0">
-                <a:solidFill>
-                  <a:srgbClr val="FFFFFF"/>
-                </a:solidFill>
-                <a:latin typeface="Calibri" pitchFamily="34" charset="0"/>
-                <a:ea typeface="Calibri" pitchFamily="34" charset="-122"/>
-                <a:cs typeface="Calibri" pitchFamily="34" charset="-120"/>
-              </a:rPr>
-              <a:t>Infrastructure de l'IA : ce qu'il faut réellement</a:t>
-            </a:r>
-            <a:endParaRPr lang="en-US" sz="1100" dirty="0"/>
-          </a:p>
-        </p:txBody>
-      </p:sp>
-      <p:sp>
-        <p:nvSpPr>
-          <p:cNvPr id="13" name="Shape 9"/>
-          <p:cNvSpPr/>
-          <p:nvPr/>
-        </p:nvSpPr>
-        <p:spPr>
-          <a:xfrm>
-            <a:off x="5943600" y="2514600"/>
-            <a:ext cx="2514600" cy="1143000"/>
-          </a:xfrm>
-          <a:prstGeom prst="roundRect">
-            <a:avLst>
-              <a:gd name="adj" fmla="val 6400"/>
-            </a:avLst>
-          </a:prstGeom>
-          <a:solidFill>
-            <a:srgbClr val="FFFFFF">
-              <a:alpha val="12000"/>
-            </a:srgbClr>
-          </a:solidFill>
-          <a:ln w="9525">
-            <a:solidFill>
-              <a:srgbClr val="FFFFFF">
-                <a:alpha val="50000"/>
-              </a:srgbClr>
-            </a:solidFill>
-            <a:prstDash val="solid"/>
-          </a:ln>
-        </p:spPr>
-      </p:sp>
-      <p:pic>
-        <p:nvPicPr>
-          <p:cNvPr id="14" name="Image 2" descr="preencoded.png"/>
-          <p:cNvPicPr>
-            <a:picLocks noChangeAspect="1"/>
-          </p:cNvPicPr>
-          <p:nvPr/>
-        </p:nvPicPr>
-        <p:blipFill>
-          <a:blip r:embed="rId6"/>
-          <a:stretch>
-            <a:fillRect/>
-          </a:stretch>
-        </p:blipFill>
-        <p:spPr>
-          <a:xfrm>
-            <a:off x="6108192" y="2670048"/>
-            <a:ext cx="310896" cy="310896"/>
-          </a:xfrm>
-          <a:prstGeom prst="rect">
-            <a:avLst/>
-          </a:prstGeom>
-        </p:spPr>
-      </p:pic>
-      <p:sp>
-        <p:nvSpPr>
-          <p:cNvPr id="15" name="Text 10"/>
-          <p:cNvSpPr txBox="1"/>
-          <p:nvPr/>
-        </p:nvSpPr>
-        <p:spPr>
-          <a:xfrm>
-            <a:off x="6510528" y="2651760"/>
-            <a:ext cx="1737360" cy="347472"/>
-          </a:xfrm>
-          <a:prstGeom prst="rect">
-            <a:avLst/>
-          </a:prstGeom>
-          <a:noFill/>
-          <a:ln/>
-        </p:spPr>
-        <p:txBody>
-          <a:bodyPr wrap="square" lIns="0" tIns="0" rIns="0" bIns="0" rtlCol="0" anchor="ctr"/>
-          <a:lstStyle/>
-          <a:p>
-            <a:pPr marL="0" indent="0">
-              <a:buNone/>
-            </a:pPr>
-            <a:r>
-              <a:rPr lang="en-US" sz="2000" b="1" dirty="0">
-                <a:solidFill>
-                  <a:srgbClr val="F5C242"/>
-                </a:solidFill>
-                <a:latin typeface="Calibri" pitchFamily="34" charset="0"/>
-                <a:ea typeface="Calibri" pitchFamily="34" charset="-122"/>
-                <a:cs typeface="Calibri" pitchFamily="34" charset="-120"/>
-              </a:rPr>
-              <a:t>15h00</a:t>
-            </a:r>
-            <a:endParaRPr lang="en-US" sz="2000" dirty="0"/>
-          </a:p>
-        </p:txBody>
-      </p:sp>
-      <p:sp>
-        <p:nvSpPr>
-          <p:cNvPr id="16" name="Text 11"/>
-          <p:cNvSpPr txBox="1"/>
-          <p:nvPr/>
-        </p:nvSpPr>
-        <p:spPr>
-          <a:xfrm>
-            <a:off x="6108192" y="3063240"/>
-            <a:ext cx="2240280" cy="548640"/>
-          </a:xfrm>
-          <a:prstGeom prst="rect">
-            <a:avLst/>
-          </a:prstGeom>
-          <a:noFill/>
-          <a:ln/>
-        </p:spPr>
-        <p:txBody>
-          <a:bodyPr wrap="square" lIns="0" tIns="0" rIns="0" bIns="0" rtlCol="0" anchor="t"/>
-          <a:lstStyle/>
-          <a:p>
-            <a:pPr marL="0" indent="0">
-              <a:buNone/>
-            </a:pPr>
-            <a:r>
-              <a:rPr lang="en-US" sz="850" b="1" kern="0" spc="200" dirty="0">
-                <a:solidFill>
-                  <a:srgbClr val="E6F6EE"/>
-                </a:solidFill>
-                <a:latin typeface="Calibri" pitchFamily="34" charset="0"/>
-                <a:ea typeface="Calibri" pitchFamily="34" charset="-122"/>
-                <a:cs typeface="Calibri" pitchFamily="34" charset="-120"/>
-              </a:rPr>
-              <a:t>ATELIER PRATIQUE</a:t>
-            </a:r>
-            <a:endParaRPr lang="en-US" sz="1100" dirty="0"/>
-          </a:p>
-          <a:p>
-            <a:pPr marL="0" indent="0">
-              <a:buNone/>
-            </a:pPr>
-            <a:r>
-              <a:rPr lang="en-US" sz="1150" b="1" dirty="0">
-                <a:solidFill>
-                  <a:srgbClr val="FFFFFF"/>
-                </a:solidFill>
-                <a:latin typeface="Calibri" pitchFamily="34" charset="0"/>
-                <a:ea typeface="Calibri" pitchFamily="34" charset="-122"/>
-                <a:cs typeface="Calibri" pitchFamily="34" charset="-120"/>
-              </a:rPr>
-              <a:t>Construire un agent, puis le casser</a:t>
-            </a:r>
-            <a:endParaRPr lang="en-US" sz="1100" dirty="0"/>
-          </a:p>
-        </p:txBody>
-      </p:sp>
-      <p:pic>
-        <p:nvPicPr>
-          <p:cNvPr id="17" name="Image 3" descr="preencoded.png"/>
-          <p:cNvPicPr>
-            <a:picLocks noChangeAspect="1"/>
-          </p:cNvPicPr>
-          <p:nvPr/>
-        </p:nvPicPr>
-        <p:blipFill>
-          <a:blip r:embed="rId7"/>
-          <a:stretch>
-            <a:fillRect/>
-          </a:stretch>
-        </p:blipFill>
-        <p:spPr>
-          <a:xfrm>
-            <a:off x="548640" y="3977640"/>
-            <a:ext cx="274320" cy="274320"/>
-          </a:xfrm>
-          <a:prstGeom prst="rect">
-            <a:avLst/>
-          </a:prstGeom>
-        </p:spPr>
-      </p:pic>
-      <p:sp>
-        <p:nvSpPr>
-          <p:cNvPr id="18" name="Text 12"/>
-          <p:cNvSpPr txBox="1"/>
-          <p:nvPr/>
-        </p:nvSpPr>
-        <p:spPr>
-          <a:xfrm>
-            <a:off x="960120" y="3931920"/>
-            <a:ext cx="7315200" cy="365760"/>
-          </a:xfrm>
-          <a:prstGeom prst="rect">
-            <a:avLst/>
-          </a:prstGeom>
-          <a:noFill/>
-          <a:ln/>
-        </p:spPr>
-        <p:txBody>
-          <a:bodyPr wrap="square" lIns="0" tIns="0" rIns="0" bIns="0" rtlCol="0" anchor="ctr"/>
-          <a:lstStyle/>
-          <a:p>
-            <a:pPr marL="0" indent="0">
-              <a:buNone/>
-            </a:pPr>
-            <a:r>
-              <a:rPr lang="en-US" sz="1300" b="1" dirty="0">
-                <a:solidFill>
-                  <a:srgbClr val="FFFFFF"/>
-                </a:solidFill>
-                <a:latin typeface="Calibri" pitchFamily="34" charset="0"/>
-                <a:ea typeface="Calibri" pitchFamily="34" charset="-122"/>
-                <a:cs typeface="Calibri" pitchFamily="34" charset="-120"/>
-              </a:rPr>
-              <a:t>À apporter : une vraie question de votre institut à laquelle un document pourrait répondre.</a:t>
-            </a:r>
-            <a:endParaRPr lang="en-US" sz="1300" dirty="0"/>
-          </a:p>
-        </p:txBody>
-      </p:sp>
-    </p:spTree>
-  </p:cSld>
-  <p:clrMapOvr>
-    <a:masterClrMapping/>
-  </p:clrMapOvr>
-  <p:transition spd="med">
-    <p:fade/>
-  </p:transition>
-</p:sld>
-</file>
-
-<file path=ppt/slides/slide32.xml><?xml version="1.0" encoding="utf-8"?>
-<p:sld xmlns:a="http://schemas.openxmlformats.org/drawingml/2006/main" xmlns:r="http://schemas.openxmlformats.org/officeDocument/2006/relationships" xmlns:p="http://schemas.openxmlformats.org/presentationml/2006/main">
   <p:cSld name="Slide 32">
     <p:bg>
       <p:bgPr>
@@ -35555,7 +34707,7 @@
 </p:sld>
 </file>
 
-<file path=ppt/slides/slide33.xml><?xml version="1.0" encoding="utf-8"?>
+<file path=ppt/slides/slide32.xml><?xml version="1.0" encoding="utf-8"?>
 <p:sld xmlns:a="http://schemas.openxmlformats.org/drawingml/2006/main" xmlns:r="http://schemas.openxmlformats.org/officeDocument/2006/relationships" xmlns:p="http://schemas.openxmlformats.org/presentationml/2006/main">
   <p:cSld name="Slide 33">
     <p:bg>
@@ -37539,7 +36691,7 @@
 </p:sld>
 </file>
 
-<file path=ppt/slides/slide34.xml><?xml version="1.0" encoding="utf-8"?>
+<file path=ppt/slides/slide33.xml><?xml version="1.0" encoding="utf-8"?>
 <p:sld xmlns:a="http://schemas.openxmlformats.org/drawingml/2006/main" xmlns:r="http://schemas.openxmlformats.org/officeDocument/2006/relationships" xmlns:p="http://schemas.openxmlformats.org/presentationml/2006/main">
   <p:cSld name="Slide 34">
     <p:bg>
@@ -38526,7 +37678,7 @@
 </p:sld>
 </file>
 
-<file path=ppt/slides/slide35.xml><?xml version="1.0" encoding="utf-8"?>
+<file path=ppt/slides/slide34.xml><?xml version="1.0" encoding="utf-8"?>
 <p:sld xmlns:a="http://schemas.openxmlformats.org/drawingml/2006/main" xmlns:r="http://schemas.openxmlformats.org/officeDocument/2006/relationships" xmlns:p="http://schemas.openxmlformats.org/presentationml/2006/main">
   <p:cSld name="Slide 35">
     <p:bg>
@@ -39438,733 +38590,7 @@
 </p:sld>
 </file>
 
-<file path=ppt/slides/slide36.xml><?xml version="1.0" encoding="utf-8"?>
-<p:sld xmlns:a="http://schemas.openxmlformats.org/drawingml/2006/main" xmlns:r="http://schemas.openxmlformats.org/officeDocument/2006/relationships" xmlns:p="http://schemas.openxmlformats.org/presentationml/2006/main">
-  <p:cSld name="Slide 36">
-    <p:bg>
-      <p:bgPr>
-        <a:solidFill>
-          <a:srgbClr val="FFFFFF"/>
-        </a:solidFill>
-        <a:effectLst/>
-      </p:bgPr>
-    </p:bg>
-    <p:spTree>
-      <p:nvGrpSpPr>
-        <p:cNvPr id="1" name=""/>
-        <p:cNvGrpSpPr/>
-        <p:nvPr/>
-      </p:nvGrpSpPr>
-      <p:grpSpPr>
-        <a:xfrm>
-          <a:off x="0" y="0"/>
-          <a:ext cx="0" cy="0"/>
-          <a:chOff x="0" y="0"/>
-          <a:chExt cx="0" cy="0"/>
-        </a:xfrm>
-      </p:grpSpPr>
-      <p:sp>
-        <p:nvSpPr>
-          <p:cNvPr id="2" name="Shape 0"/>
-          <p:cNvSpPr/>
-          <p:nvPr/>
-        </p:nvSpPr>
-        <p:spPr>
-          <a:xfrm>
-            <a:off x="0" y="0"/>
-            <a:ext cx="9144000" cy="54864"/>
-          </a:xfrm>
-          <a:prstGeom prst="rect">
-            <a:avLst/>
-          </a:prstGeom>
-          <a:solidFill>
-            <a:srgbClr val="00A86A"/>
-          </a:solidFill>
-          <a:ln/>
-        </p:spPr>
-      </p:sp>
-      <p:sp>
-        <p:nvSpPr>
-          <p:cNvPr id="3" name="Shape 1"/>
-          <p:cNvSpPr/>
-          <p:nvPr/>
-        </p:nvSpPr>
-        <p:spPr>
-          <a:xfrm>
-            <a:off x="0" y="0"/>
-            <a:ext cx="1234440" cy="54864"/>
-          </a:xfrm>
-          <a:prstGeom prst="rect">
-            <a:avLst/>
-          </a:prstGeom>
-          <a:solidFill>
-            <a:srgbClr val="F5C242"/>
-          </a:solidFill>
-          <a:ln/>
-        </p:spPr>
-      </p:sp>
-      <p:sp>
-        <p:nvSpPr>
-          <p:cNvPr id="4" name="Shape 2"/>
-          <p:cNvSpPr/>
-          <p:nvPr/>
-        </p:nvSpPr>
-        <p:spPr>
-          <a:xfrm>
-            <a:off x="7406640" y="3383280"/>
-            <a:ext cx="2743200" cy="2743200"/>
-          </a:xfrm>
-          <a:prstGeom prst="ellipse">
-            <a:avLst/>
-          </a:prstGeom>
-          <a:solidFill>
-            <a:srgbClr val="00A86A">
-              <a:alpha val="5000"/>
-            </a:srgbClr>
-          </a:solidFill>
-          <a:ln/>
-        </p:spPr>
-      </p:sp>
-      <p:sp>
-        <p:nvSpPr>
-          <p:cNvPr id="5" name="Shape 3"/>
-          <p:cNvSpPr/>
-          <p:nvPr/>
-        </p:nvSpPr>
-        <p:spPr>
-          <a:xfrm>
-            <a:off x="7955280" y="3931920"/>
-            <a:ext cx="1645920" cy="1645920"/>
-          </a:xfrm>
-          <a:prstGeom prst="ellipse">
-            <a:avLst/>
-          </a:prstGeom>
-          <a:solidFill>
-            <a:srgbClr val="00A86A">
-              <a:alpha val="5000"/>
-            </a:srgbClr>
-          </a:solidFill>
-          <a:ln/>
-        </p:spPr>
-      </p:sp>
-      <p:sp>
-        <p:nvSpPr>
-          <p:cNvPr id="6" name="Text 4"/>
-          <p:cNvSpPr txBox="1"/>
-          <p:nvPr/>
-        </p:nvSpPr>
-        <p:spPr>
-          <a:xfrm>
-            <a:off x="457200" y="274320"/>
-            <a:ext cx="6858000" cy="201168"/>
-          </a:xfrm>
-          <a:prstGeom prst="rect">
-            <a:avLst/>
-          </a:prstGeom>
-          <a:noFill/>
-          <a:ln/>
-        </p:spPr>
-        <p:txBody>
-          <a:bodyPr wrap="square" lIns="0" tIns="0" rIns="0" bIns="0" rtlCol="0" anchor="t"/>
-          <a:lstStyle/>
-          <a:p>
-            <a:pPr marL="0" indent="0">
-              <a:buNone/>
-            </a:pPr>
-            <a:r>
-              <a:rPr lang="en-US" sz="1050" b="1" kern="0" spc="150" dirty="0">
-                <a:solidFill>
-                  <a:srgbClr val="00704A"/>
-                </a:solidFill>
-                <a:latin typeface="Calibri" pitchFamily="34" charset="0"/>
-                <a:ea typeface="Calibri" pitchFamily="34" charset="-122"/>
-                <a:cs typeface="Calibri" pitchFamily="34" charset="-120"/>
-              </a:rPr>
-              <a:t>ANNEXE  ·  COÛT DU PRÉ-ENTRAÎNEMENT</a:t>
-            </a:r>
-            <a:endParaRPr lang="en-US" sz="1050" dirty="0"/>
-          </a:p>
-        </p:txBody>
-      </p:sp>
-      <p:sp>
-        <p:nvSpPr>
-          <p:cNvPr id="7" name="Text 5"/>
-          <p:cNvSpPr txBox="1"/>
-          <p:nvPr/>
-        </p:nvSpPr>
-        <p:spPr>
-          <a:xfrm>
-            <a:off x="457200" y="475488"/>
-            <a:ext cx="7498080" cy="749808"/>
-          </a:xfrm>
-          <a:prstGeom prst="rect">
-            <a:avLst/>
-          </a:prstGeom>
-          <a:noFill/>
-          <a:ln/>
-        </p:spPr>
-        <p:txBody>
-          <a:bodyPr wrap="square" lIns="0" tIns="0" rIns="0" bIns="0" rtlCol="0" anchor="ctr"/>
-          <a:lstStyle/>
-          <a:p>
-            <a:pPr marL="0" indent="0">
-              <a:buNone/>
-            </a:pPr>
-            <a:r>
-              <a:rPr lang="en-US" sz="2400" b="1" dirty="0">
-                <a:solidFill>
-                  <a:srgbClr val="231F20"/>
-                </a:solidFill>
-                <a:latin typeface="Calibri" pitchFamily="34" charset="0"/>
-                <a:ea typeface="Calibri" pitchFamily="34" charset="-122"/>
-                <a:cs typeface="Calibri" pitchFamily="34" charset="-120"/>
-              </a:rPr>
-              <a:t>Pourquoi un INS ne pré-entraînera pas son propre GML</a:t>
-            </a:r>
-            <a:endParaRPr lang="en-US" sz="2400" dirty="0"/>
-          </a:p>
-        </p:txBody>
-      </p:sp>
-      <p:sp>
-        <p:nvSpPr>
-          <p:cNvPr id="8" name="Text 6"/>
-          <p:cNvSpPr txBox="1"/>
-          <p:nvPr/>
-        </p:nvSpPr>
-        <p:spPr>
-          <a:xfrm>
-            <a:off x="457200" y="4846320"/>
-            <a:ext cx="4572000" cy="182880"/>
-          </a:xfrm>
-          <a:prstGeom prst="rect">
-            <a:avLst/>
-          </a:prstGeom>
-          <a:noFill/>
-          <a:ln/>
-        </p:spPr>
-        <p:txBody>
-          <a:bodyPr wrap="square" lIns="0" tIns="0" rIns="0" bIns="0" rtlCol="0" anchor="t"/>
-          <a:lstStyle/>
-          <a:p>
-            <a:pPr marL="0" indent="0">
-              <a:buNone/>
-            </a:pPr>
-            <a:r>
-              <a:rPr lang="en-US" sz="850" dirty="0">
-                <a:solidFill>
-                  <a:srgbClr val="8A9590"/>
-                </a:solidFill>
-                <a:latin typeface="Calibri" pitchFamily="34" charset="0"/>
-                <a:ea typeface="Calibri" pitchFamily="34" charset="-122"/>
-                <a:cs typeface="Calibri" pitchFamily="34" charset="-120"/>
-              </a:rPr>
-              <a:t>L'arbre généalogique de l'IA  ·  STG17</a:t>
-            </a:r>
-            <a:endParaRPr lang="en-US" sz="850" dirty="0"/>
-          </a:p>
-        </p:txBody>
-      </p:sp>
-      <p:sp>
-        <p:nvSpPr>
-          <p:cNvPr id="9" name="Text 7"/>
-          <p:cNvSpPr txBox="1"/>
-          <p:nvPr/>
-        </p:nvSpPr>
-        <p:spPr>
-          <a:xfrm>
-            <a:off x="7772400" y="4846320"/>
-            <a:ext cx="914400" cy="182880"/>
-          </a:xfrm>
-          <a:prstGeom prst="rect">
-            <a:avLst/>
-          </a:prstGeom>
-          <a:noFill/>
-          <a:ln/>
-        </p:spPr>
-        <p:txBody>
-          <a:bodyPr wrap="square" lIns="0" tIns="0" rIns="0" bIns="0" rtlCol="0" anchor="t"/>
-          <a:lstStyle/>
-          <a:p>
-            <a:pPr marL="0" indent="0" algn="r">
-              <a:buNone/>
-            </a:pPr>
-            <a:r>
-              <a:rPr lang="en-US" sz="850" dirty="0">
-                <a:solidFill>
-                  <a:srgbClr val="8A9590"/>
-                </a:solidFill>
-                <a:latin typeface="Calibri" pitchFamily="34" charset="0"/>
-                <a:ea typeface="Calibri" pitchFamily="34" charset="-122"/>
-                <a:cs typeface="Calibri" pitchFamily="34" charset="-120"/>
-              </a:rPr>
-              <a:t>36</a:t>
-            </a:r>
-            <a:endParaRPr lang="en-US" sz="850" dirty="0"/>
-          </a:p>
-        </p:txBody>
-      </p:sp>
-      <p:sp>
-        <p:nvSpPr>
-          <p:cNvPr id="10" name="Shape 8"/>
-          <p:cNvSpPr/>
-          <p:nvPr/>
-        </p:nvSpPr>
-        <p:spPr>
-          <a:xfrm>
-            <a:off x="457200" y="1371600"/>
-            <a:ext cx="3474720" cy="2834640"/>
-          </a:xfrm>
-          <a:prstGeom prst="roundRect">
-            <a:avLst>
-              <a:gd name="adj" fmla="val 2581"/>
-            </a:avLst>
-          </a:prstGeom>
-          <a:solidFill>
-            <a:srgbClr val="E8F5EF"/>
-          </a:solidFill>
-          <a:ln w="15875">
-            <a:solidFill>
-              <a:srgbClr val="00A86A"/>
-            </a:solidFill>
-            <a:prstDash val="solid"/>
-          </a:ln>
-        </p:spPr>
-      </p:sp>
-      <p:sp>
-        <p:nvSpPr>
-          <p:cNvPr id="11" name="Text 9"/>
-          <p:cNvSpPr txBox="1"/>
-          <p:nvPr/>
-        </p:nvSpPr>
-        <p:spPr>
-          <a:xfrm>
-            <a:off x="640080" y="1600200"/>
-            <a:ext cx="3108960" cy="1005840"/>
-          </a:xfrm>
-          <a:prstGeom prst="rect">
-            <a:avLst/>
-          </a:prstGeom>
-          <a:noFill/>
-          <a:ln/>
-        </p:spPr>
-        <p:txBody>
-          <a:bodyPr wrap="square" lIns="0" tIns="0" rIns="0" bIns="0" rtlCol="0" anchor="ctr"/>
-          <a:lstStyle/>
-          <a:p>
-            <a:pPr marL="0" indent="0" algn="ctr">
-              <a:buNone/>
-            </a:pPr>
-            <a:r>
-              <a:rPr lang="en-US" sz="6000" b="1" dirty="0">
-                <a:solidFill>
-                  <a:srgbClr val="00A86A"/>
-                </a:solidFill>
-                <a:latin typeface="Calibri" pitchFamily="34" charset="0"/>
-                <a:ea typeface="Calibri" pitchFamily="34" charset="-122"/>
-                <a:cs typeface="Calibri" pitchFamily="34" charset="-120"/>
-              </a:rPr>
-              <a:t>20 : 1</a:t>
-            </a:r>
-            <a:endParaRPr lang="en-US" sz="6000" dirty="0"/>
-          </a:p>
-        </p:txBody>
-      </p:sp>
-      <p:sp>
-        <p:nvSpPr>
-          <p:cNvPr id="12" name="Text 10"/>
-          <p:cNvSpPr txBox="1"/>
-          <p:nvPr/>
-        </p:nvSpPr>
-        <p:spPr>
-          <a:xfrm>
-            <a:off x="731520" y="2697480"/>
-            <a:ext cx="2926080" cy="640080"/>
-          </a:xfrm>
-          <a:prstGeom prst="rect">
-            <a:avLst/>
-          </a:prstGeom>
-          <a:noFill/>
-          <a:ln/>
-        </p:spPr>
-        <p:txBody>
-          <a:bodyPr wrap="square" lIns="0" tIns="0" rIns="0" bIns="0" rtlCol="0" anchor="t"/>
-          <a:lstStyle/>
-          <a:p>
-            <a:pPr marL="0" indent="0" algn="ctr">
-              <a:buNone/>
-            </a:pPr>
-            <a:r>
-              <a:rPr lang="en-US" sz="1200" dirty="0">
-                <a:solidFill>
-                  <a:srgbClr val="5E6964"/>
-                </a:solidFill>
-                <a:latin typeface="Calibri" pitchFamily="34" charset="0"/>
-                <a:ea typeface="Calibri" pitchFamily="34" charset="-122"/>
-                <a:cs typeface="Calibri" pitchFamily="34" charset="-120"/>
-              </a:rPr>
-              <a:t>jetons d'entraînement par paramètre pour un modèle optimal en calcul</a:t>
-            </a:r>
-            <a:endParaRPr lang="en-US" sz="1200" dirty="0"/>
-          </a:p>
-        </p:txBody>
-      </p:sp>
-      <p:sp>
-        <p:nvSpPr>
-          <p:cNvPr id="13" name="Shape 11"/>
-          <p:cNvSpPr/>
-          <p:nvPr/>
-        </p:nvSpPr>
-        <p:spPr>
-          <a:xfrm>
-            <a:off x="4206240" y="1417320"/>
-            <a:ext cx="457200" cy="457200"/>
-          </a:xfrm>
-          <a:prstGeom prst="ellipse">
-            <a:avLst/>
-          </a:prstGeom>
-          <a:solidFill>
-            <a:srgbClr val="00704A">
-              <a:alpha val="22000"/>
-            </a:srgbClr>
-          </a:solidFill>
-          <a:ln/>
-        </p:spPr>
-      </p:sp>
-      <p:pic>
-        <p:nvPicPr>
-          <p:cNvPr id="14" name="Image 0" descr="preencoded.png"/>
-          <p:cNvPicPr>
-            <a:picLocks noChangeAspect="1"/>
-          </p:cNvPicPr>
-          <p:nvPr/>
-        </p:nvPicPr>
-        <p:blipFill>
-          <a:blip r:embed="rId3"/>
-          <a:stretch>
-            <a:fillRect/>
-          </a:stretch>
-        </p:blipFill>
-        <p:spPr>
-          <a:xfrm>
-            <a:off x="4315968" y="1527048"/>
-            <a:ext cx="237744" cy="237744"/>
-          </a:xfrm>
-          <a:prstGeom prst="rect">
-            <a:avLst/>
-          </a:prstGeom>
-        </p:spPr>
-      </p:pic>
-      <p:sp>
-        <p:nvSpPr>
-          <p:cNvPr id="15" name="Text 12"/>
-          <p:cNvSpPr txBox="1"/>
-          <p:nvPr/>
-        </p:nvSpPr>
-        <p:spPr>
-          <a:xfrm>
-            <a:off x="4800600" y="1371600"/>
-            <a:ext cx="3886200" cy="868680"/>
-          </a:xfrm>
-          <a:prstGeom prst="rect">
-            <a:avLst/>
-          </a:prstGeom>
-          <a:noFill/>
-          <a:ln/>
-        </p:spPr>
-        <p:txBody>
-          <a:bodyPr wrap="square" lIns="0" tIns="0" rIns="0" bIns="0" rtlCol="0" anchor="t"/>
-          <a:lstStyle/>
-          <a:p>
-            <a:pPr marL="0" indent="0">
-              <a:buNone/>
-            </a:pPr>
-            <a:r>
-              <a:rPr lang="en-US" sz="1250" b="1" dirty="0">
-                <a:solidFill>
-                  <a:srgbClr val="00704A"/>
-                </a:solidFill>
-                <a:latin typeface="Calibri" pitchFamily="34" charset="0"/>
-                <a:ea typeface="Calibri" pitchFamily="34" charset="-122"/>
-                <a:cs typeface="Calibri" pitchFamily="34" charset="-120"/>
-              </a:rPr>
-              <a:t>Un ordre de grandeur</a:t>
-            </a:r>
-            <a:endParaRPr lang="en-US" sz="1100" dirty="0"/>
-          </a:p>
-          <a:p>
-            <a:pPr marL="0" indent="0">
-              <a:buNone/>
-            </a:pPr>
-            <a:r>
-              <a:rPr lang="en-US" sz="1050" dirty="0">
-                <a:solidFill>
-                  <a:srgbClr val="231F20"/>
-                </a:solidFill>
-                <a:latin typeface="Calibri" pitchFamily="34" charset="0"/>
-                <a:ea typeface="Calibri" pitchFamily="34" charset="-122"/>
-                <a:cs typeface="Calibri" pitchFamily="34" charset="-120"/>
-              </a:rPr>
-              <a:t>À l'échelle des modèles utilisés cette semaine, cela représente un corpus et un budget de calcul qu'aucun INS ne réunira — ni ne devrait réunir.</a:t>
-            </a:r>
-            <a:endParaRPr lang="en-US" sz="1100" dirty="0"/>
-          </a:p>
-        </p:txBody>
-      </p:sp>
-      <p:sp>
-        <p:nvSpPr>
-          <p:cNvPr id="16" name="Shape 13"/>
-          <p:cNvSpPr/>
-          <p:nvPr/>
-        </p:nvSpPr>
-        <p:spPr>
-          <a:xfrm>
-            <a:off x="4206240" y="2377440"/>
-            <a:ext cx="457200" cy="457200"/>
-          </a:xfrm>
-          <a:prstGeom prst="ellipse">
-            <a:avLst/>
-          </a:prstGeom>
-          <a:solidFill>
-            <a:srgbClr val="D49A00">
-              <a:alpha val="22000"/>
-            </a:srgbClr>
-          </a:solidFill>
-          <a:ln/>
-        </p:spPr>
-      </p:sp>
-      <p:pic>
-        <p:nvPicPr>
-          <p:cNvPr id="17" name="Image 1" descr="preencoded.png"/>
-          <p:cNvPicPr>
-            <a:picLocks noChangeAspect="1"/>
-          </p:cNvPicPr>
-          <p:nvPr/>
-        </p:nvPicPr>
-        <p:blipFill>
-          <a:blip r:embed="rId4"/>
-          <a:stretch>
-            <a:fillRect/>
-          </a:stretch>
-        </p:blipFill>
-        <p:spPr>
-          <a:xfrm>
-            <a:off x="4315968" y="2487168"/>
-            <a:ext cx="237744" cy="237744"/>
-          </a:xfrm>
-          <a:prstGeom prst="rect">
-            <a:avLst/>
-          </a:prstGeom>
-        </p:spPr>
-      </p:pic>
-      <p:sp>
-        <p:nvSpPr>
-          <p:cNvPr id="18" name="Text 14"/>
-          <p:cNvSpPr txBox="1"/>
-          <p:nvPr/>
-        </p:nvSpPr>
-        <p:spPr>
-          <a:xfrm>
-            <a:off x="4800600" y="2331720"/>
-            <a:ext cx="3886200" cy="868680"/>
-          </a:xfrm>
-          <a:prstGeom prst="rect">
-            <a:avLst/>
-          </a:prstGeom>
-          <a:noFill/>
-          <a:ln/>
-        </p:spPr>
-        <p:txBody>
-          <a:bodyPr wrap="square" lIns="0" tIns="0" rIns="0" bIns="0" rtlCol="0" anchor="t"/>
-          <a:lstStyle/>
-          <a:p>
-            <a:pPr marL="0" indent="0">
-              <a:buNone/>
-            </a:pPr>
-            <a:r>
-              <a:rPr lang="en-US" sz="1250" b="1" dirty="0">
-                <a:solidFill>
-                  <a:srgbClr val="D49A00"/>
-                </a:solidFill>
-                <a:latin typeface="Calibri" pitchFamily="34" charset="0"/>
-                <a:ea typeface="Calibri" pitchFamily="34" charset="-122"/>
-                <a:cs typeface="Calibri" pitchFamily="34" charset="-120"/>
-              </a:rPr>
-              <a:t>Ne pas confondre</a:t>
-            </a:r>
-            <a:endParaRPr lang="en-US" sz="1100" dirty="0"/>
-          </a:p>
-          <a:p>
-            <a:pPr marL="0" indent="0">
-              <a:buNone/>
-            </a:pPr>
-            <a:r>
-              <a:rPr lang="en-US" sz="1050" dirty="0">
-                <a:solidFill>
-                  <a:srgbClr val="231F20"/>
-                </a:solidFill>
-                <a:latin typeface="Calibri" pitchFamily="34" charset="0"/>
-                <a:ea typeface="Calibri" pitchFamily="34" charset="-122"/>
-                <a:cs typeface="Calibri" pitchFamily="34" charset="-120"/>
-              </a:rPr>
-              <a:t>Pré-entraînement (hors de portée) et affinage (accessible, par exemple avec LoRA sur une seule carte graphique).</a:t>
-            </a:r>
-            <a:endParaRPr lang="en-US" sz="1100" dirty="0"/>
-          </a:p>
-        </p:txBody>
-      </p:sp>
-      <p:sp>
-        <p:nvSpPr>
-          <p:cNvPr id="19" name="Shape 15"/>
-          <p:cNvSpPr/>
-          <p:nvPr/>
-        </p:nvSpPr>
-        <p:spPr>
-          <a:xfrm>
-            <a:off x="4206240" y="3337560"/>
-            <a:ext cx="457200" cy="457200"/>
-          </a:xfrm>
-          <a:prstGeom prst="ellipse">
-            <a:avLst/>
-          </a:prstGeom>
-          <a:solidFill>
-            <a:srgbClr val="00A86A">
-              <a:alpha val="22000"/>
-            </a:srgbClr>
-          </a:solidFill>
-          <a:ln/>
-        </p:spPr>
-      </p:sp>
-      <p:pic>
-        <p:nvPicPr>
-          <p:cNvPr id="20" name="Image 2" descr="preencoded.png"/>
-          <p:cNvPicPr>
-            <a:picLocks noChangeAspect="1"/>
-          </p:cNvPicPr>
-          <p:nvPr/>
-        </p:nvPicPr>
-        <p:blipFill>
-          <a:blip r:embed="rId5"/>
-          <a:stretch>
-            <a:fillRect/>
-          </a:stretch>
-        </p:blipFill>
-        <p:spPr>
-          <a:xfrm>
-            <a:off x="4315968" y="3447288"/>
-            <a:ext cx="237744" cy="237744"/>
-          </a:xfrm>
-          <a:prstGeom prst="rect">
-            <a:avLst/>
-          </a:prstGeom>
-        </p:spPr>
-      </p:pic>
-      <p:sp>
-        <p:nvSpPr>
-          <p:cNvPr id="21" name="Text 16"/>
-          <p:cNvSpPr txBox="1"/>
-          <p:nvPr/>
-        </p:nvSpPr>
-        <p:spPr>
-          <a:xfrm>
-            <a:off x="4800600" y="3291840"/>
-            <a:ext cx="3886200" cy="868680"/>
-          </a:xfrm>
-          <a:prstGeom prst="rect">
-            <a:avLst/>
-          </a:prstGeom>
-          <a:noFill/>
-          <a:ln/>
-        </p:spPr>
-        <p:txBody>
-          <a:bodyPr wrap="square" lIns="0" tIns="0" rIns="0" bIns="0" rtlCol="0" anchor="t"/>
-          <a:lstStyle/>
-          <a:p>
-            <a:pPr marL="0" indent="0">
-              <a:buNone/>
-            </a:pPr>
-            <a:r>
-              <a:rPr lang="en-US" sz="1250" b="1" dirty="0">
-                <a:solidFill>
-                  <a:srgbClr val="00A86A"/>
-                </a:solidFill>
-                <a:latin typeface="Calibri" pitchFamily="34" charset="0"/>
-                <a:ea typeface="Calibri" pitchFamily="34" charset="-122"/>
-                <a:cs typeface="Calibri" pitchFamily="34" charset="-120"/>
-              </a:rPr>
-              <a:t>La vraie décision</a:t>
-            </a:r>
-            <a:endParaRPr lang="en-US" sz="1100" dirty="0"/>
-          </a:p>
-          <a:p>
-            <a:pPr marL="0" indent="0">
-              <a:buNone/>
-            </a:pPr>
-            <a:r>
-              <a:rPr lang="en-US" sz="1050" dirty="0">
-                <a:solidFill>
-                  <a:srgbClr val="231F20"/>
-                </a:solidFill>
-                <a:latin typeface="Calibri" pitchFamily="34" charset="0"/>
-                <a:ea typeface="Calibri" pitchFamily="34" charset="-122"/>
-                <a:cs typeface="Calibri" pitchFamily="34" charset="-120"/>
-              </a:rPr>
-              <a:t>Choisir, évaluer et encadrer un modèle existant — pas en construire un.</a:t>
-            </a:r>
-            <a:endParaRPr lang="en-US" sz="1100" dirty="0"/>
-          </a:p>
-        </p:txBody>
-      </p:sp>
-      <p:sp>
-        <p:nvSpPr>
-          <p:cNvPr id="22" name="Text 17"/>
-          <p:cNvSpPr txBox="1"/>
-          <p:nvPr/>
-        </p:nvSpPr>
-        <p:spPr>
-          <a:xfrm>
-            <a:off x="457200" y="4590288"/>
-            <a:ext cx="8138160" cy="201168"/>
-          </a:xfrm>
-          <a:prstGeom prst="rect">
-            <a:avLst/>
-          </a:prstGeom>
-          <a:noFill/>
-          <a:ln/>
-        </p:spPr>
-        <p:txBody>
-          <a:bodyPr wrap="square" lIns="0" tIns="0" rIns="0" bIns="0" rtlCol="0" anchor="ctr"/>
-          <a:lstStyle/>
-          <a:p>
-            <a:pPr marL="0" indent="0">
-              <a:buNone/>
-            </a:pPr>
-            <a:r>
-              <a:rPr lang="en-US" sz="900" i="1" dirty="0">
-                <a:solidFill>
-                  <a:srgbClr val="5E6964"/>
-                </a:solidFill>
-                <a:latin typeface="Calibri" pitchFamily="34" charset="0"/>
-                <a:ea typeface="Calibri" pitchFamily="34" charset="-122"/>
-                <a:cs typeface="Calibri" pitchFamily="34" charset="-120"/>
-              </a:rPr>
-              <a:t>Hoffmann et al. (2022), Training Compute-Optimal LLMs, NeurIPS 35 · Hu et al. (2022), LoRA, ICLR · Dettmers et al. (2023), QLoRA, NeurIPS 36.</a:t>
-            </a:r>
-            <a:endParaRPr lang="en-US" sz="900" dirty="0"/>
-          </a:p>
-        </p:txBody>
-      </p:sp>
-    </p:spTree>
-  </p:cSld>
-  <p:clrMapOvr>
-    <a:masterClrMapping/>
-  </p:clrMapOvr>
-  <p:transition spd="med">
-    <p:fade/>
-  </p:transition>
-</p:sld>
-</file>
-
-<file path=ppt/slides/slide37.xml><?xml version="1.0" encoding="utf-8"?>
+<file path=ppt/slides/slide35.xml><?xml version="1.0" encoding="utf-8"?>
 <p:sld xmlns:a="http://schemas.openxmlformats.org/drawingml/2006/main" xmlns:r="http://schemas.openxmlformats.org/officeDocument/2006/relationships" xmlns:p="http://schemas.openxmlformats.org/presentationml/2006/main">
   <p:cSld name="Slide 37">
     <p:bg>
@@ -41000,7 +39426,7 @@
 </p:sld>
 </file>
 
-<file path=ppt/slides/slide38.xml><?xml version="1.0" encoding="utf-8"?>
+<file path=ppt/slides/slide36.xml><?xml version="1.0" encoding="utf-8"?>
 <p:sld xmlns:a="http://schemas.openxmlformats.org/drawingml/2006/main" xmlns:r="http://schemas.openxmlformats.org/officeDocument/2006/relationships" xmlns:p="http://schemas.openxmlformats.org/presentationml/2006/main">
   <p:cSld name="Slide 38">
     <p:bg>
@@ -41836,7 +40262,7 @@
 </p:sld>
 </file>
 
-<file path=ppt/slides/slide39.xml><?xml version="1.0" encoding="utf-8"?>
+<file path=ppt/slides/slide37.xml><?xml version="1.0" encoding="utf-8"?>
 <p:sld xmlns:a="http://schemas.openxmlformats.org/drawingml/2006/main" xmlns:r="http://schemas.openxmlformats.org/officeDocument/2006/relationships" xmlns:p="http://schemas.openxmlformats.org/presentationml/2006/main">
   <p:cSld name="Slide 39">
     <p:bg>

--- a/docs/downloads/Day1/1005_ai-family-tree_FR.pptx
+++ b/docs/downloads/Day1/1005_ai-family-tree_FR.pptx
@@ -32217,74 +32217,6 @@
       </p:sp>
       <p:sp>
         <p:nvSpPr>
-          <p:cNvPr id="14" name="Shape 12"/>
-          <p:cNvSpPr/>
-          <p:nvPr/>
-        </p:nvSpPr>
-        <p:spPr>
-          <a:xfrm>
-            <a:off x="2286000" y="1600200"/>
-            <a:ext cx="594360" cy="219456"/>
-          </a:xfrm>
-          <a:prstGeom prst="roundRect">
-            <a:avLst>
-              <a:gd name="adj" fmla="val 50000"/>
-            </a:avLst>
-          </a:prstGeom>
-          <a:solidFill>
-            <a:srgbClr val="00A86A">
-              <a:alpha val="15000"/>
-            </a:srgbClr>
-          </a:solidFill>
-          <a:ln w="9525">
-            <a:solidFill>
-              <a:srgbClr val="00A86A"/>
-            </a:solidFill>
-            <a:prstDash val="solid"/>
-          </a:ln>
-        </p:spPr>
-      </p:sp>
-      <p:sp>
-        <p:nvSpPr>
-          <p:cNvPr id="15" name="Text 13"/>
-          <p:cNvSpPr txBox="1"/>
-          <p:nvPr/>
-        </p:nvSpPr>
-        <p:spPr>
-          <a:xfrm>
-            <a:off x="2286000" y="1600200"/>
-            <a:ext cx="594360" cy="219456"/>
-          </a:xfrm>
-          <a:prstGeom prst="rect">
-            <a:avLst/>
-          </a:prstGeom>
-          <a:noFill/>
-          <a:ln/>
-        </p:spPr>
-        <p:txBody>
-          <a:bodyPr wrap="square" lIns="0" tIns="0" rIns="0" bIns="0" rtlCol="0" anchor="ctr"/>
-          <a:lstStyle/>
-          <a:p>
-            <a:pPr marL="0" indent="0" algn="ctr">
-              <a:buNone/>
-            </a:pPr>
-            <a:r>
-              <a:rPr lang="en-US" sz="900" b="1" dirty="0">
-                <a:solidFill>
-                  <a:srgbClr val="00A86A"/>
-                </a:solidFill>
-                <a:latin typeface="Calibri" pitchFamily="34" charset="0"/>
-                <a:ea typeface="Calibri" pitchFamily="34" charset="-122"/>
-                <a:cs typeface="Calibri" pitchFamily="34" charset="-120"/>
-              </a:rPr>
-              <a:t>2 min</a:t>
-            </a:r>
-            <a:endParaRPr lang="en-US" sz="900" dirty="0"/>
-          </a:p>
-        </p:txBody>
-      </p:sp>
-      <p:sp>
-        <p:nvSpPr>
           <p:cNvPr id="16" name="Shape 14"/>
           <p:cNvSpPr/>
           <p:nvPr/>
@@ -32429,74 +32361,6 @@
       </p:sp>
       <p:sp>
         <p:nvSpPr>
-          <p:cNvPr id="20" name="Shape 18"/>
-          <p:cNvSpPr/>
-          <p:nvPr/>
-        </p:nvSpPr>
-        <p:spPr>
-          <a:xfrm>
-            <a:off x="5074920" y="1600200"/>
-            <a:ext cx="594360" cy="219456"/>
-          </a:xfrm>
-          <a:prstGeom prst="roundRect">
-            <a:avLst>
-              <a:gd name="adj" fmla="val 50000"/>
-            </a:avLst>
-          </a:prstGeom>
-          <a:solidFill>
-            <a:srgbClr val="00704A">
-              <a:alpha val="15000"/>
-            </a:srgbClr>
-          </a:solidFill>
-          <a:ln w="9525">
-            <a:solidFill>
-              <a:srgbClr val="00704A"/>
-            </a:solidFill>
-            <a:prstDash val="solid"/>
-          </a:ln>
-        </p:spPr>
-      </p:sp>
-      <p:sp>
-        <p:nvSpPr>
-          <p:cNvPr id="21" name="Text 19"/>
-          <p:cNvSpPr txBox="1"/>
-          <p:nvPr/>
-        </p:nvSpPr>
-        <p:spPr>
-          <a:xfrm>
-            <a:off x="5074920" y="1600200"/>
-            <a:ext cx="594360" cy="219456"/>
-          </a:xfrm>
-          <a:prstGeom prst="rect">
-            <a:avLst/>
-          </a:prstGeom>
-          <a:noFill/>
-          <a:ln/>
-        </p:spPr>
-        <p:txBody>
-          <a:bodyPr wrap="square" lIns="0" tIns="0" rIns="0" bIns="0" rtlCol="0" anchor="ctr"/>
-          <a:lstStyle/>
-          <a:p>
-            <a:pPr marL="0" indent="0" algn="ctr">
-              <a:buNone/>
-            </a:pPr>
-            <a:r>
-              <a:rPr lang="en-US" sz="900" b="1" dirty="0">
-                <a:solidFill>
-                  <a:srgbClr val="00704A"/>
-                </a:solidFill>
-                <a:latin typeface="Calibri" pitchFamily="34" charset="0"/>
-                <a:ea typeface="Calibri" pitchFamily="34" charset="-122"/>
-                <a:cs typeface="Calibri" pitchFamily="34" charset="-120"/>
-              </a:rPr>
-              <a:t>6 min</a:t>
-            </a:r>
-            <a:endParaRPr lang="en-US" sz="900" dirty="0"/>
-          </a:p>
-        </p:txBody>
-      </p:sp>
-      <p:sp>
-        <p:nvSpPr>
           <p:cNvPr id="22" name="Shape 20"/>
           <p:cNvSpPr/>
           <p:nvPr/>
@@ -32641,74 +32505,6 @@
       </p:sp>
       <p:sp>
         <p:nvSpPr>
-          <p:cNvPr id="26" name="Shape 24"/>
-          <p:cNvSpPr/>
-          <p:nvPr/>
-        </p:nvSpPr>
-        <p:spPr>
-          <a:xfrm>
-            <a:off x="7863840" y="1600200"/>
-            <a:ext cx="594360" cy="219456"/>
-          </a:xfrm>
-          <a:prstGeom prst="roundRect">
-            <a:avLst>
-              <a:gd name="adj" fmla="val 50000"/>
-            </a:avLst>
-          </a:prstGeom>
-          <a:solidFill>
-            <a:srgbClr val="0E7C86">
-              <a:alpha val="15000"/>
-            </a:srgbClr>
-          </a:solidFill>
-          <a:ln w="9525">
-            <a:solidFill>
-              <a:srgbClr val="0E7C86"/>
-            </a:solidFill>
-            <a:prstDash val="solid"/>
-          </a:ln>
-        </p:spPr>
-      </p:sp>
-      <p:sp>
-        <p:nvSpPr>
-          <p:cNvPr id="27" name="Text 25"/>
-          <p:cNvSpPr txBox="1"/>
-          <p:nvPr/>
-        </p:nvSpPr>
-        <p:spPr>
-          <a:xfrm>
-            <a:off x="7863840" y="1600200"/>
-            <a:ext cx="594360" cy="219456"/>
-          </a:xfrm>
-          <a:prstGeom prst="rect">
-            <a:avLst/>
-          </a:prstGeom>
-          <a:noFill/>
-          <a:ln/>
-        </p:spPr>
-        <p:txBody>
-          <a:bodyPr wrap="square" lIns="0" tIns="0" rIns="0" bIns="0" rtlCol="0" anchor="ctr"/>
-          <a:lstStyle/>
-          <a:p>
-            <a:pPr marL="0" indent="0" algn="ctr">
-              <a:buNone/>
-            </a:pPr>
-            <a:r>
-              <a:rPr lang="en-US" sz="900" b="1" dirty="0">
-                <a:solidFill>
-                  <a:srgbClr val="0E7C86"/>
-                </a:solidFill>
-                <a:latin typeface="Calibri" pitchFamily="34" charset="0"/>
-                <a:ea typeface="Calibri" pitchFamily="34" charset="-122"/>
-                <a:cs typeface="Calibri" pitchFamily="34" charset="-120"/>
-              </a:rPr>
-              <a:t>6 min</a:t>
-            </a:r>
-            <a:endParaRPr lang="en-US" sz="900" dirty="0"/>
-          </a:p>
-        </p:txBody>
-      </p:sp>
-      <p:sp>
-        <p:nvSpPr>
           <p:cNvPr id="28" name="Shape 26"/>
           <p:cNvSpPr/>
           <p:nvPr/>
@@ -32853,74 +32649,6 @@
       </p:sp>
       <p:sp>
         <p:nvSpPr>
-          <p:cNvPr id="32" name="Shape 30"/>
-          <p:cNvSpPr/>
-          <p:nvPr/>
-        </p:nvSpPr>
-        <p:spPr>
-          <a:xfrm>
-            <a:off x="2286000" y="3200400"/>
-            <a:ext cx="594360" cy="219456"/>
-          </a:xfrm>
-          <a:prstGeom prst="roundRect">
-            <a:avLst>
-              <a:gd name="adj" fmla="val 50000"/>
-            </a:avLst>
-          </a:prstGeom>
-          <a:solidFill>
-            <a:srgbClr val="D49A00">
-              <a:alpha val="15000"/>
-            </a:srgbClr>
-          </a:solidFill>
-          <a:ln w="9525">
-            <a:solidFill>
-              <a:srgbClr val="D49A00"/>
-            </a:solidFill>
-            <a:prstDash val="solid"/>
-          </a:ln>
-        </p:spPr>
-      </p:sp>
-      <p:sp>
-        <p:nvSpPr>
-          <p:cNvPr id="33" name="Text 31"/>
-          <p:cNvSpPr txBox="1"/>
-          <p:nvPr/>
-        </p:nvSpPr>
-        <p:spPr>
-          <a:xfrm>
-            <a:off x="2286000" y="3200400"/>
-            <a:ext cx="594360" cy="219456"/>
-          </a:xfrm>
-          <a:prstGeom prst="rect">
-            <a:avLst/>
-          </a:prstGeom>
-          <a:noFill/>
-          <a:ln/>
-        </p:spPr>
-        <p:txBody>
-          <a:bodyPr wrap="square" lIns="0" tIns="0" rIns="0" bIns="0" rtlCol="0" anchor="ctr"/>
-          <a:lstStyle/>
-          <a:p>
-            <a:pPr marL="0" indent="0" algn="ctr">
-              <a:buNone/>
-            </a:pPr>
-            <a:r>
-              <a:rPr lang="en-US" sz="900" b="1" dirty="0">
-                <a:solidFill>
-                  <a:srgbClr val="D49A00"/>
-                </a:solidFill>
-                <a:latin typeface="Calibri" pitchFamily="34" charset="0"/>
-                <a:ea typeface="Calibri" pitchFamily="34" charset="-122"/>
-                <a:cs typeface="Calibri" pitchFamily="34" charset="-120"/>
-              </a:rPr>
-              <a:t>6 min</a:t>
-            </a:r>
-            <a:endParaRPr lang="en-US" sz="900" dirty="0"/>
-          </a:p>
-        </p:txBody>
-      </p:sp>
-      <p:sp>
-        <p:nvSpPr>
           <p:cNvPr id="34" name="Shape 32"/>
           <p:cNvSpPr/>
           <p:nvPr/>
@@ -33065,74 +32793,6 @@
       </p:sp>
       <p:sp>
         <p:nvSpPr>
-          <p:cNvPr id="38" name="Shape 36"/>
-          <p:cNvSpPr/>
-          <p:nvPr/>
-        </p:nvSpPr>
-        <p:spPr>
-          <a:xfrm>
-            <a:off x="5074920" y="3200400"/>
-            <a:ext cx="594360" cy="219456"/>
-          </a:xfrm>
-          <a:prstGeom prst="roundRect">
-            <a:avLst>
-              <a:gd name="adj" fmla="val 50000"/>
-            </a:avLst>
-          </a:prstGeom>
-          <a:solidFill>
-            <a:srgbClr val="C4621D">
-              <a:alpha val="15000"/>
-            </a:srgbClr>
-          </a:solidFill>
-          <a:ln w="9525">
-            <a:solidFill>
-              <a:srgbClr val="C4621D"/>
-            </a:solidFill>
-            <a:prstDash val="solid"/>
-          </a:ln>
-        </p:spPr>
-      </p:sp>
-      <p:sp>
-        <p:nvSpPr>
-          <p:cNvPr id="39" name="Text 37"/>
-          <p:cNvSpPr txBox="1"/>
-          <p:nvPr/>
-        </p:nvSpPr>
-        <p:spPr>
-          <a:xfrm>
-            <a:off x="5074920" y="3200400"/>
-            <a:ext cx="594360" cy="219456"/>
-          </a:xfrm>
-          <a:prstGeom prst="rect">
-            <a:avLst/>
-          </a:prstGeom>
-          <a:noFill/>
-          <a:ln/>
-        </p:spPr>
-        <p:txBody>
-          <a:bodyPr wrap="square" lIns="0" tIns="0" rIns="0" bIns="0" rtlCol="0" anchor="ctr"/>
-          <a:lstStyle/>
-          <a:p>
-            <a:pPr marL="0" indent="0" algn="ctr">
-              <a:buNone/>
-            </a:pPr>
-            <a:r>
-              <a:rPr lang="en-US" sz="900" b="1" dirty="0">
-                <a:solidFill>
-                  <a:srgbClr val="C4621D"/>
-                </a:solidFill>
-                <a:latin typeface="Calibri" pitchFamily="34" charset="0"/>
-                <a:ea typeface="Calibri" pitchFamily="34" charset="-122"/>
-                <a:cs typeface="Calibri" pitchFamily="34" charset="-120"/>
-              </a:rPr>
-              <a:t>5 min</a:t>
-            </a:r>
-            <a:endParaRPr lang="en-US" sz="900" dirty="0"/>
-          </a:p>
-        </p:txBody>
-      </p:sp>
-      <p:sp>
-        <p:nvSpPr>
           <p:cNvPr id="40" name="Shape 38"/>
           <p:cNvSpPr/>
           <p:nvPr/>
@@ -33272,74 +32932,6 @@
               <a:t>AI Ready, peut / ne peut pas, ligne rouge</a:t>
             </a:r>
             <a:endParaRPr lang="en-US" sz="1000" dirty="0"/>
-          </a:p>
-        </p:txBody>
-      </p:sp>
-      <p:sp>
-        <p:nvSpPr>
-          <p:cNvPr id="44" name="Shape 42"/>
-          <p:cNvSpPr/>
-          <p:nvPr/>
-        </p:nvSpPr>
-        <p:spPr>
-          <a:xfrm>
-            <a:off x="7863840" y="3200400"/>
-            <a:ext cx="594360" cy="219456"/>
-          </a:xfrm>
-          <a:prstGeom prst="roundRect">
-            <a:avLst>
-              <a:gd name="adj" fmla="val 50000"/>
-            </a:avLst>
-          </a:prstGeom>
-          <a:solidFill>
-            <a:srgbClr val="B83B2E">
-              <a:alpha val="15000"/>
-            </a:srgbClr>
-          </a:solidFill>
-          <a:ln w="9525">
-            <a:solidFill>
-              <a:srgbClr val="B83B2E"/>
-            </a:solidFill>
-            <a:prstDash val="solid"/>
-          </a:ln>
-        </p:spPr>
-      </p:sp>
-      <p:sp>
-        <p:nvSpPr>
-          <p:cNvPr id="45" name="Text 43"/>
-          <p:cNvSpPr txBox="1"/>
-          <p:nvPr/>
-        </p:nvSpPr>
-        <p:spPr>
-          <a:xfrm>
-            <a:off x="7863840" y="3200400"/>
-            <a:ext cx="594360" cy="219456"/>
-          </a:xfrm>
-          <a:prstGeom prst="rect">
-            <a:avLst/>
-          </a:prstGeom>
-          <a:noFill/>
-          <a:ln/>
-        </p:spPr>
-        <p:txBody>
-          <a:bodyPr wrap="square" lIns="0" tIns="0" rIns="0" bIns="0" rtlCol="0" anchor="ctr"/>
-          <a:lstStyle/>
-          <a:p>
-            <a:pPr marL="0" indent="0" algn="ctr">
-              <a:buNone/>
-            </a:pPr>
-            <a:r>
-              <a:rPr lang="en-US" sz="900" b="1" dirty="0">
-                <a:solidFill>
-                  <a:srgbClr val="B83B2E"/>
-                </a:solidFill>
-                <a:latin typeface="Calibri" pitchFamily="34" charset="0"/>
-                <a:ea typeface="Calibri" pitchFamily="34" charset="-122"/>
-                <a:cs typeface="Calibri" pitchFamily="34" charset="-120"/>
-              </a:rPr>
-              <a:t>5 min</a:t>
-            </a:r>
-            <a:endParaRPr lang="en-US" sz="900" dirty="0"/>
           </a:p>
         </p:txBody>
       </p:sp>
